--- a/BACKUP&RECOVERY/14장/14장_RMAN_백업.pptx
+++ b/BACKUP&RECOVERY/14장/14장_RMAN_백업.pptx
@@ -7325,7 +7325,7 @@
                 <a:latin typeface="Consolas"/>
                 <a:ea typeface="Consolas"/>
               </a:rPr>
-              <a:t>RMAN&gt; BACKUP DATAFILE '/u02/oradata/ORCL/users01.dbf';</a:t>
+              <a:t>RMAN&gt; BACKUP DATAFILE '/u01/app/oracle/oradata/orcl/users01.dbf';</a:t>
             </a:r>
           </a:p>
           <a:p>
@@ -9400,7 +9400,7 @@
                 <a:latin typeface="Consolas"/>
                 <a:ea typeface="Consolas"/>
               </a:rPr>
-              <a:t>  2    USING FILE '/u02/oradata/ORCL/bct_orcl.chg' REUSE;</a:t>
+              <a:t>  2    USING FILE '/u02/oradata/orcl/bct_orcl.chg' REUSE;</a:t>
             </a:r>
           </a:p>
           <a:p>
@@ -9502,7 +9502,7 @@
                 <a:latin typeface="Consolas"/>
                 <a:ea typeface="Consolas"/>
               </a:rPr>
-              <a:t>ENABLED    /u02/oradata/ORCL/bct_orcl.chg          11</a:t>
+              <a:t>ENABLED    /u02/oradata/orcl/bct_orcl.chg          11</a:t>
             </a:r>
           </a:p>
           <a:p>
@@ -18098,7 +18098,7 @@
                 <a:latin typeface="Consolas"/>
                 <a:ea typeface="Consolas"/>
               </a:rPr>
-              <a:t>input datafile file number=00001 name=/u02/oradata/ORCL/system01.dbf</a:t>
+              <a:t>input datafile file number=00001 name=/u01/app/oracle/oradata/orcl/system01.dbf</a:t>
             </a:r>
           </a:p>
           <a:p>
@@ -18115,7 +18115,7 @@
                 <a:latin typeface="Consolas"/>
                 <a:ea typeface="Consolas"/>
               </a:rPr>
-              <a:t>input datafile file number=00004 name=/u02/oradata/ORCL/undotbs01.dbf</a:t>
+              <a:t>input datafile file number=00004 name=/u01/app/oracle/oradata/orcl/undotbs01.dbf</a:t>
             </a:r>
           </a:p>
           <a:p>
@@ -18149,7 +18149,7 @@
                 <a:latin typeface="Consolas"/>
                 <a:ea typeface="Consolas"/>
               </a:rPr>
-              <a:t>input datafile file number=00003 name=/u02/oradata/ORCL/sysaux01.dbf</a:t>
+              <a:t>input datafile file number=00003 name=/u01/app/oracle/oradata/orcl/sysaux01.dbf</a:t>
             </a:r>
           </a:p>
           <a:p>
